--- a/docs/design/p1c0/report-sample.pptx
+++ b/docs/design/p1c0/report-sample.pptx
@@ -10560,7 +10560,7 @@
                           <a:ea typeface="Noto Sans KR" pitchFamily="34" charset="-122"/>
                           <a:cs typeface="Noto Sans KR" pitchFamily="34" charset="-120"/>
                         </a:rPr>
-                        <a:t>1,998년</a:t>
+                        <a:t>1998년</a:t>
                       </a:r>
                       <a:endParaRPr lang="en-US" sz="1200" dirty="0">
                         <a:latin typeface="Noto Sans KR" charset="0"/>
